--- a/result/AI 모델 결과 보고.pptx
+++ b/result/AI 모델 결과 보고.pptx
@@ -270,7 +270,7 @@
           <a:p>
             <a:fld id="{B72759B8-7332-44BD-B1FF-13450B6DA7DC}" type="datetimeFigureOut">
               <a:rPr lang="ko-KR" altLang="en-US" smtClean="0"/>
-              <a:t>2026-01-09</a:t>
+              <a:t>2026-01-14</a:t>
             </a:fld>
             <a:endParaRPr lang="ko-KR" altLang="en-US"/>
           </a:p>
@@ -440,7 +440,7 @@
           <a:p>
             <a:fld id="{B72759B8-7332-44BD-B1FF-13450B6DA7DC}" type="datetimeFigureOut">
               <a:rPr lang="ko-KR" altLang="en-US" smtClean="0"/>
-              <a:t>2026-01-09</a:t>
+              <a:t>2026-01-14</a:t>
             </a:fld>
             <a:endParaRPr lang="ko-KR" altLang="en-US"/>
           </a:p>
@@ -620,7 +620,7 @@
           <a:p>
             <a:fld id="{B72759B8-7332-44BD-B1FF-13450B6DA7DC}" type="datetimeFigureOut">
               <a:rPr lang="ko-KR" altLang="en-US" smtClean="0"/>
-              <a:t>2026-01-09</a:t>
+              <a:t>2026-01-14</a:t>
             </a:fld>
             <a:endParaRPr lang="ko-KR" altLang="en-US"/>
           </a:p>
@@ -790,7 +790,7 @@
           <a:p>
             <a:fld id="{B72759B8-7332-44BD-B1FF-13450B6DA7DC}" type="datetimeFigureOut">
               <a:rPr lang="ko-KR" altLang="en-US" smtClean="0"/>
-              <a:t>2026-01-09</a:t>
+              <a:t>2026-01-14</a:t>
             </a:fld>
             <a:endParaRPr lang="ko-KR" altLang="en-US"/>
           </a:p>
@@ -1041,7 +1041,7 @@
           <a:p>
             <a:fld id="{B72759B8-7332-44BD-B1FF-13450B6DA7DC}" type="datetimeFigureOut">
               <a:rPr lang="ko-KR" altLang="en-US" smtClean="0"/>
-              <a:t>2026-01-09</a:t>
+              <a:t>2026-01-14</a:t>
             </a:fld>
             <a:endParaRPr lang="ko-KR" altLang="en-US"/>
           </a:p>
@@ -1273,7 +1273,7 @@
           <a:p>
             <a:fld id="{B72759B8-7332-44BD-B1FF-13450B6DA7DC}" type="datetimeFigureOut">
               <a:rPr lang="ko-KR" altLang="en-US" smtClean="0"/>
-              <a:t>2026-01-09</a:t>
+              <a:t>2026-01-14</a:t>
             </a:fld>
             <a:endParaRPr lang="ko-KR" altLang="en-US"/>
           </a:p>
@@ -1620,7 +1620,7 @@
           <a:p>
             <a:fld id="{B72759B8-7332-44BD-B1FF-13450B6DA7DC}" type="datetimeFigureOut">
               <a:rPr lang="ko-KR" altLang="en-US" smtClean="0"/>
-              <a:t>2026-01-09</a:t>
+              <a:t>2026-01-14</a:t>
             </a:fld>
             <a:endParaRPr lang="ko-KR" altLang="en-US"/>
           </a:p>
@@ -1738,7 +1738,7 @@
           <a:p>
             <a:fld id="{B72759B8-7332-44BD-B1FF-13450B6DA7DC}" type="datetimeFigureOut">
               <a:rPr lang="ko-KR" altLang="en-US" smtClean="0"/>
-              <a:t>2026-01-09</a:t>
+              <a:t>2026-01-14</a:t>
             </a:fld>
             <a:endParaRPr lang="ko-KR" altLang="en-US"/>
           </a:p>
@@ -1856,7 +1856,7 @@
           <a:p>
             <a:fld id="{B72759B8-7332-44BD-B1FF-13450B6DA7DC}" type="datetimeFigureOut">
               <a:rPr lang="ko-KR" altLang="en-US" smtClean="0"/>
-              <a:t>2026-01-09</a:t>
+              <a:t>2026-01-14</a:t>
             </a:fld>
             <a:endParaRPr lang="ko-KR" altLang="en-US"/>
           </a:p>
@@ -2140,7 +2140,7 @@
           <a:p>
             <a:fld id="{B72759B8-7332-44BD-B1FF-13450B6DA7DC}" type="datetimeFigureOut">
               <a:rPr lang="ko-KR" altLang="en-US" smtClean="0"/>
-              <a:t>2026-01-09</a:t>
+              <a:t>2026-01-14</a:t>
             </a:fld>
             <a:endParaRPr lang="ko-KR" altLang="en-US"/>
           </a:p>
@@ -2404,7 +2404,7 @@
           <a:p>
             <a:fld id="{B72759B8-7332-44BD-B1FF-13450B6DA7DC}" type="datetimeFigureOut">
               <a:rPr lang="ko-KR" altLang="en-US" smtClean="0"/>
-              <a:t>2026-01-09</a:t>
+              <a:t>2026-01-14</a:t>
             </a:fld>
             <a:endParaRPr lang="ko-KR" altLang="en-US"/>
           </a:p>
@@ -2618,7 +2618,7 @@
           <a:p>
             <a:fld id="{B72759B8-7332-44BD-B1FF-13450B6DA7DC}" type="datetimeFigureOut">
               <a:rPr lang="ko-KR" altLang="en-US" smtClean="0"/>
-              <a:t>2026-01-09</a:t>
+              <a:t>2026-01-14</a:t>
             </a:fld>
             <a:endParaRPr lang="ko-KR" altLang="en-US"/>
           </a:p>
@@ -12446,51 +12446,39 @@
             <a:r>
               <a:rPr lang="en-US" altLang="ko-KR" sz="2000" b="1" dirty="0" err="1">
                 <a:latin typeface="+mj-ea"/>
-                <a:ea typeface="+mj-ea"/>
               </a:rPr>
               <a:t>num_of_layer</a:t>
             </a:r>
             <a:r>
               <a:rPr lang="en-US" altLang="ko-KR" sz="2000" b="1" dirty="0">
                 <a:latin typeface="+mj-ea"/>
-                <a:ea typeface="+mj-ea"/>
-              </a:rPr>
-              <a:t> =18</a:t>
+              </a:rPr>
+              <a:t> =18, </a:t>
+            </a:r>
+            <a:r>
+              <a:rPr lang="en-US" altLang="ko-KR" sz="2000" b="1" dirty="0" err="1">
+                <a:latin typeface="+mj-ea"/>
+              </a:rPr>
+              <a:t>loss_function</a:t>
             </a:r>
             <a:r>
               <a:rPr lang="en-US" altLang="ko-KR" sz="2000" b="1" dirty="0">
                 <a:latin typeface="+mj-ea"/>
               </a:rPr>
-              <a:t> </a:t>
+              <a:t> = MSE, </a:t>
             </a:r>
             <a:r>
               <a:rPr lang="en-US" altLang="ko-KR" sz="2000" b="1" dirty="0" err="1">
                 <a:latin typeface="+mj-ea"/>
               </a:rPr>
-              <a:t>loss_function</a:t>
+              <a:t>learning_rate</a:t>
             </a:r>
             <a:r>
               <a:rPr lang="en-US" altLang="ko-KR" sz="2000" b="1" dirty="0">
                 <a:latin typeface="+mj-ea"/>
               </a:rPr>
-              <a:t> = MAE, </a:t>
-            </a:r>
-            <a:r>
-              <a:rPr lang="en-US" altLang="ko-KR" sz="2000" b="1" dirty="0" err="1">
-                <a:latin typeface="+mj-ea"/>
-              </a:rPr>
-              <a:t>learning_rate</a:t>
-            </a:r>
-            <a:r>
-              <a:rPr lang="en-US" altLang="ko-KR" sz="2000" b="1" dirty="0">
-                <a:latin typeface="+mj-ea"/>
-              </a:rPr>
-              <a:t> = 0.0005 </a:t>
-            </a:r>
-            <a:endParaRPr lang="en-US" altLang="ko-KR" sz="2000" b="1" dirty="0">
-              <a:latin typeface="+mj-ea"/>
-              <a:ea typeface="+mj-ea"/>
-            </a:endParaRPr>
+              <a:t> = 0.0001 </a:t>
+            </a:r>
           </a:p>
           <a:p>
             <a:r>
